--- a/docs/flowgrid-os-customer-deck.pptx
+++ b/docs/flowgrid-os-customer-deck.pptx
@@ -10,7 +10,6 @@
     <p:sldId id="258" r:id="rId9"/>
     <p:sldId id="259" r:id="rId10"/>
     <p:sldId id="260" r:id="rId11"/>
-    <p:sldId id="261" r:id="rId12"/>
     <p:sldId id="262" r:id="rId13"/>
   </p:sldIdLst>
   <p:sldSz cx="12191695" cy="6858000" type="screen4x3"/>
@@ -3245,7 +3244,7 @@
                 </a:solidFill>
                 <a:latin typeface="Georgia"/>
               </a:rPr>
-              <a:t>AI workspace for UK small businesses</a:t>
+              <a:t>AI workspace for UK small organisations</a:t>
             </a:r>
           </a:p>
         </p:txBody>
@@ -3280,7 +3279,7 @@
                 </a:solidFill>
                 <a:latin typeface="Calibri"/>
               </a:rPr>
-              <a:t>One workspace. Your brand. Your data.</a:t>
+              <a:t>Turn what your organisation knows into work you can trust.</a:t>
             </a:r>
           </a:p>
         </p:txBody>
@@ -3453,7 +3452,7 @@
               </a:defRPr>
             </a:pPr>
             <a:r>
-              <a:t>• SMBs are buying AI in fragments — chat, documents, slides, research, each with its own login and bill.</a:t>
+              <a:t>• Small organisations run on scattered documents, repeated re-keying and blank-page reporting.</a:t>
             </a:r>
           </a:p>
           <a:p>
@@ -3472,7 +3471,7 @@
               </a:defRPr>
             </a:pPr>
             <a:r>
-              <a:t>• Closed models are expensive and often train on your data.</a:t>
+              <a:t>• Generic AI tools give uncited answers that are hard to check before they reach a funder or client.</a:t>
             </a:r>
           </a:p>
           <a:p>
@@ -3491,7 +3490,7 @@
               </a:defRPr>
             </a:pPr>
             <a:r>
-              <a:t>• Company knowledge sits in folders and spreadsheets, never where the work happens.</a:t>
+              <a:t>• What the organisation knows sits in folders and spreadsheets, never where the work happens.</a:t>
             </a:r>
           </a:p>
         </p:txBody>
@@ -3664,7 +3663,7 @@
               </a:defRPr>
             </a:pPr>
             <a:r>
-              <a:t>• A single branded workspace for every client: their logo, their accent, their documents.</a:t>
+              <a:t>• One workspace connects your source documents, confirmed facts and live projects.</a:t>
             </a:r>
           </a:p>
           <a:p>
@@ -3683,7 +3682,7 @@
               </a:defRPr>
             </a:pPr>
             <a:r>
-              <a:t>• Answers cite the source page, so staff can trust what the AI says.</a:t>
+              <a:t>• Answers cite the document and page, and say so plainly when the vault has nothing.</a:t>
             </a:r>
           </a:p>
           <a:p>
@@ -3702,7 +3701,7 @@
               </a:defRPr>
             </a:pPr>
             <a:r>
-              <a:t>• Every task is routed to the cheapest capable open-weight model — no closed-model lock-in.</a:t>
+              <a:t>• Confirm a fact once and every draft reuses it; projects carry stages, budgets and risks.</a:t>
             </a:r>
           </a:p>
           <a:p>
@@ -3721,7 +3720,7 @@
               </a:defRPr>
             </a:pPr>
             <a:r>
-              <a:t>• Usage caps and per-tenant budgets prevent surprise invoices.</a:t>
+              <a:t>• Branded PDF and editable PowerPoint outputs. You review everything; Flowgrid never sends on your behalf.</a:t>
             </a:r>
           </a:p>
         </p:txBody>
@@ -3894,7 +3893,7 @@
               </a:defRPr>
             </a:pPr>
             <a:r>
-              <a:t>• Branded AI chat with page-level citations</a:t>
+              <a:t>• Cited answers: every answer links to its document and page</a:t>
             </a:r>
           </a:p>
           <a:p>
@@ -3913,7 +3912,7 @@
               </a:defRPr>
             </a:pPr>
             <a:r>
-              <a:t>• Cited knowledge vault (PDF, Word, Excel, Markdown)</a:t>
+              <a:t>• Document vault (PDF, Word, Excel), searchable</a:t>
             </a:r>
           </a:p>
           <a:p>
@@ -3932,7 +3931,7 @@
               </a:defRPr>
             </a:pPr>
             <a:r>
-              <a:t>• Research mode with cited web sources</a:t>
+              <a:t>• Confirmed facts: review once, reuse in every draft</a:t>
             </a:r>
           </a:p>
           <a:p>
@@ -3951,7 +3950,7 @@
               </a:defRPr>
             </a:pPr>
             <a:r>
-              <a:t>• Native PowerPoint slide export</a:t>
+              <a:t>• Projects and plans with stages, budgets and risks</a:t>
             </a:r>
           </a:p>
         </p:txBody>
@@ -3993,7 +3992,7 @@
               </a:defRPr>
             </a:pPr>
             <a:r>
-              <a:t>• CRM contact book with CSV import</a:t>
+              <a:t>• Branded exports: PDF and editable PowerPoint</a:t>
             </a:r>
           </a:p>
           <a:p>
@@ -4012,7 +4011,7 @@
               </a:defRPr>
             </a:pPr>
             <a:r>
-              <a:t>• Project spine for stage-gated work</a:t>
+              <a:t>• Research mode with cited web sources</a:t>
             </a:r>
           </a:p>
           <a:p>
@@ -4031,7 +4030,7 @@
               </a:defRPr>
             </a:pPr>
             <a:r>
-              <a:t>• Email &amp; calendar sync (roadmap)</a:t>
+              <a:t>• Contact book with spreadsheet import</a:t>
             </a:r>
           </a:p>
           <a:p>
@@ -4050,7 +4049,26 @@
               </a:defRPr>
             </a:pPr>
             <a:r>
-              <a:t>• Meeting intelligence (roadmap)</a:t>
+              <a:t>• Usage and cost recorded on every AI call</a:t>
+            </a:r>
+          </a:p>
+          <a:p>
+            <a:pPr>
+              <a:lnSpc>
+                <a:spcPct val="120000"/>
+              </a:lnSpc>
+              <a:spcAft>
+                <a:spcPts val="1000"/>
+              </a:spcAft>
+              <a:defRPr sz="1900">
+                <a:solidFill>
+                  <a:srgbClr val="2D2A26"/>
+                </a:solidFill>
+                <a:latin typeface="Calibri"/>
+              </a:defRPr>
+            </a:pPr>
+            <a:r>
+              <a:t>• Coming: email &amp; calendar sync, meeting intelligence</a:t>
             </a:r>
           </a:p>
         </p:txBody>
@@ -4223,7 +4241,7 @@
               </a:defRPr>
             </a:pPr>
             <a:r>
-              <a:t>• Tenant isolation enforced by Postgres row-level security.</a:t>
+              <a:t>• Your workspace is isolated from every other customer at the database level, not only by application code.</a:t>
             </a:r>
           </a:p>
           <a:p>
@@ -4242,7 +4260,7 @@
               </a:defRPr>
             </a:pPr>
             <a:r>
-              <a:t>• Zero-data-retention US/EU hosts by default; nothing trains on your files.</a:t>
+              <a:t>• UK-held data. Zero-data-retention hosting by default; your documents are not used to train anyone’s models.</a:t>
             </a:r>
           </a:p>
           <a:p>
@@ -4261,7 +4279,7 @@
               </a:defRPr>
             </a:pPr>
             <a:r>
-              <a:t>• Soft caps nudge, hard caps protect; full audit logs.</a:t>
+              <a:t>• UK GDPR, with a Data Processing Agreement as part of your terms, plus standard-format export and agreed return and deletion.</a:t>
             </a:r>
           </a:p>
           <a:p>
@@ -4280,7 +4298,7 @@
               </a:defRPr>
             </a:pPr>
             <a:r>
-              <a:t>• MIT/Apache stack only — no hidden licensing overhang.</a:t>
+              <a:t>• Every AI call is recorded with usage and cost, and spending limits keep invoices predictable.</a:t>
             </a:r>
           </a:p>
         </p:txBody>
@@ -4288,941 +4306,6 @@
       <p:sp>
         <p:nvSpPr>
           <p:cNvPr id="5" name="TextBox 4"/>
-          <p:cNvSpPr txBox="1"/>
-          <p:nvPr/>
-        </p:nvSpPr>
-        <p:spPr>
-          <a:xfrm>
-            <a:off x="548640" y="6537960"/>
-            <a:ext cx="11094415" cy="228600"/>
-          </a:xfrm>
-          <a:prstGeom prst="rect">
-            <a:avLst/>
-          </a:prstGeom>
-          <a:noFill/>
-        </p:spPr>
-        <p:txBody>
-          <a:bodyPr wrap="square">
-            <a:spAutoFit/>
-          </a:bodyPr>
-          <a:lstStyle/>
-          <a:p>
-            <a:pPr algn="r"/>
-            <a:r>
-              <a:rPr sz="1000" b="0">
-                <a:solidFill>
-                  <a:srgbClr val="5B5752"/>
-                </a:solidFill>
-                <a:latin typeface="Calibri"/>
-              </a:rPr>
-              <a:t>flowgridos.co.uk</a:t>
-            </a:r>
-          </a:p>
-        </p:txBody>
-      </p:sp>
-    </p:spTree>
-  </p:cSld>
-  <p:clrMapOvr>
-    <a:masterClrMapping/>
-  </p:clrMapOvr>
-</p:sld>
-</file>
-
-<file path=ppt/slides/slide6.xml><?xml version="1.0" encoding="utf-8"?>
-<p:sld xmlns:a="http://schemas.openxmlformats.org/drawingml/2006/main" xmlns:p="http://schemas.openxmlformats.org/presentationml/2006/main" xmlns:r="http://schemas.openxmlformats.org/officeDocument/2006/relationships">
-  <p:cSld>
-    <p:spTree>
-      <p:nvGrpSpPr>
-        <p:cNvPr id="1" name=""/>
-        <p:cNvGrpSpPr/>
-        <p:nvPr/>
-      </p:nvGrpSpPr>
-      <p:grpSpPr/>
-      <p:sp>
-        <p:nvSpPr>
-          <p:cNvPr id="2" name="Rectangle 1"/>
-          <p:cNvSpPr/>
-          <p:nvPr/>
-        </p:nvSpPr>
-        <p:spPr>
-          <a:xfrm>
-            <a:off x="0" y="0"/>
-            <a:ext cx="12191695" cy="1005840"/>
-          </a:xfrm>
-          <a:prstGeom prst="rect">
-            <a:avLst/>
-          </a:prstGeom>
-          <a:solidFill>
-            <a:srgbClr val="B14E2E"/>
-          </a:solidFill>
-          <a:ln>
-            <a:noFill/>
-          </a:ln>
-        </p:spPr>
-        <p:style>
-          <a:lnRef idx="1">
-            <a:schemeClr val="accent1"/>
-          </a:lnRef>
-          <a:fillRef idx="3">
-            <a:schemeClr val="accent1"/>
-          </a:fillRef>
-          <a:effectRef idx="2">
-            <a:schemeClr val="accent1"/>
-          </a:effectRef>
-          <a:fontRef idx="minor">
-            <a:schemeClr val="lt1"/>
-          </a:fontRef>
-        </p:style>
-        <p:txBody>
-          <a:bodyPr rtlCol="0" anchor="ctr"/>
-          <a:lstStyle/>
-          <a:p>
-            <a:pPr algn="ctr"/>
-          </a:p>
-        </p:txBody>
-      </p:sp>
-      <p:sp>
-        <p:nvSpPr>
-          <p:cNvPr id="3" name="TextBox 2"/>
-          <p:cNvSpPr txBox="1"/>
-          <p:nvPr/>
-        </p:nvSpPr>
-        <p:spPr>
-          <a:xfrm>
-            <a:off x="548640" y="201168"/>
-            <a:ext cx="11094415" cy="731520"/>
-          </a:xfrm>
-          <a:prstGeom prst="rect">
-            <a:avLst/>
-          </a:prstGeom>
-          <a:noFill/>
-        </p:spPr>
-        <p:txBody>
-          <a:bodyPr wrap="square">
-            <a:spAutoFit/>
-          </a:bodyPr>
-          <a:lstStyle/>
-          <a:p>
-            <a:pPr algn="l"/>
-            <a:r>
-              <a:rPr sz="3400" b="1">
-                <a:solidFill>
-                  <a:srgbClr val="FFFFFF"/>
-                </a:solidFill>
-                <a:latin typeface="Georgia"/>
-              </a:rPr>
-              <a:t>Simple, per-seat pricing</a:t>
-            </a:r>
-          </a:p>
-        </p:txBody>
-      </p:sp>
-      <p:sp>
-        <p:nvSpPr>
-          <p:cNvPr id="4" name="Rounded Rectangle 3"/>
-          <p:cNvSpPr/>
-          <p:nvPr/>
-        </p:nvSpPr>
-        <p:spPr>
-          <a:xfrm>
-            <a:off x="548640" y="1371600"/>
-            <a:ext cx="3515258" cy="4389120"/>
-          </a:xfrm>
-          <a:prstGeom prst="roundRect">
-            <a:avLst/>
-          </a:prstGeom>
-          <a:solidFill>
-            <a:srgbClr val="F6F2ED"/>
-          </a:solidFill>
-          <a:ln w="25400">
-            <a:solidFill>
-              <a:srgbClr val="B14E2E"/>
-            </a:solidFill>
-          </a:ln>
-        </p:spPr>
-        <p:style>
-          <a:lnRef idx="1">
-            <a:schemeClr val="accent1"/>
-          </a:lnRef>
-          <a:fillRef idx="3">
-            <a:schemeClr val="accent1"/>
-          </a:fillRef>
-          <a:effectRef idx="2">
-            <a:schemeClr val="accent1"/>
-          </a:effectRef>
-          <a:fontRef idx="minor">
-            <a:schemeClr val="lt1"/>
-          </a:fontRef>
-        </p:style>
-        <p:txBody>
-          <a:bodyPr rtlCol="0" anchor="ctr"/>
-          <a:lstStyle/>
-          <a:p>
-            <a:pPr algn="ctr"/>
-          </a:p>
-        </p:txBody>
-      </p:sp>
-      <p:sp>
-        <p:nvSpPr>
-          <p:cNvPr id="5" name="TextBox 4"/>
-          <p:cNvSpPr txBox="1"/>
-          <p:nvPr/>
-        </p:nvSpPr>
-        <p:spPr>
-          <a:xfrm>
-            <a:off x="685800" y="1508760"/>
-            <a:ext cx="3240938" cy="457200"/>
-          </a:xfrm>
-          <a:prstGeom prst="rect">
-            <a:avLst/>
-          </a:prstGeom>
-          <a:noFill/>
-        </p:spPr>
-        <p:txBody>
-          <a:bodyPr wrap="square">
-            <a:spAutoFit/>
-          </a:bodyPr>
-          <a:lstStyle/>
-          <a:p>
-            <a:pPr algn="ctr"/>
-            <a:r>
-              <a:rPr sz="2200" b="1">
-                <a:solidFill>
-                  <a:srgbClr val="B14E2E"/>
-                </a:solidFill>
-                <a:latin typeface="Georgia"/>
-              </a:rPr>
-              <a:t>Core</a:t>
-            </a:r>
-          </a:p>
-        </p:txBody>
-      </p:sp>
-      <p:sp>
-        <p:nvSpPr>
-          <p:cNvPr id="6" name="TextBox 5"/>
-          <p:cNvSpPr txBox="1"/>
-          <p:nvPr/>
-        </p:nvSpPr>
-        <p:spPr>
-          <a:xfrm>
-            <a:off x="685800" y="2011680"/>
-            <a:ext cx="3240938" cy="548640"/>
-          </a:xfrm>
-          <a:prstGeom prst="rect">
-            <a:avLst/>
-          </a:prstGeom>
-          <a:noFill/>
-        </p:spPr>
-        <p:txBody>
-          <a:bodyPr wrap="square">
-            <a:spAutoFit/>
-          </a:bodyPr>
-          <a:lstStyle/>
-          <a:p>
-            <a:pPr algn="ctr"/>
-            <a:r>
-              <a:rPr sz="3200" b="1">
-                <a:solidFill>
-                  <a:srgbClr val="B14E2E"/>
-                </a:solidFill>
-                <a:latin typeface="Calibri"/>
-              </a:rPr>
-              <a:t>£29</a:t>
-            </a:r>
-          </a:p>
-        </p:txBody>
-      </p:sp>
-      <p:sp>
-        <p:nvSpPr>
-          <p:cNvPr id="7" name="TextBox 6"/>
-          <p:cNvSpPr txBox="1"/>
-          <p:nvPr/>
-        </p:nvSpPr>
-        <p:spPr>
-          <a:xfrm>
-            <a:off x="685800" y="2514600"/>
-            <a:ext cx="3240938" cy="365760"/>
-          </a:xfrm>
-          <a:prstGeom prst="rect">
-            <a:avLst/>
-          </a:prstGeom>
-          <a:noFill/>
-        </p:spPr>
-        <p:txBody>
-          <a:bodyPr wrap="square">
-            <a:spAutoFit/>
-          </a:bodyPr>
-          <a:lstStyle/>
-          <a:p>
-            <a:pPr algn="ctr"/>
-            <a:r>
-              <a:rPr sz="1200" b="0">
-                <a:solidFill>
-                  <a:srgbClr val="2D2A26"/>
-                </a:solidFill>
-                <a:latin typeface="Calibri"/>
-              </a:rPr>
-              <a:t>/seat/mo · min 3</a:t>
-            </a:r>
-          </a:p>
-        </p:txBody>
-      </p:sp>
-      <p:sp>
-        <p:nvSpPr>
-          <p:cNvPr id="8" name="TextBox 7"/>
-          <p:cNvSpPr txBox="1"/>
-          <p:nvPr/>
-        </p:nvSpPr>
-        <p:spPr>
-          <a:xfrm>
-            <a:off x="731520" y="2971800"/>
-            <a:ext cx="3149498" cy="2560320"/>
-          </a:xfrm>
-          <a:prstGeom prst="rect">
-            <a:avLst/>
-          </a:prstGeom>
-          <a:noFill/>
-        </p:spPr>
-        <p:txBody>
-          <a:bodyPr wrap="square" anchor="t">
-            <a:spAutoFit/>
-          </a:bodyPr>
-          <a:lstStyle/>
-          <a:p>
-            <a:pPr>
-              <a:lnSpc>
-                <a:spcPct val="120000"/>
-              </a:lnSpc>
-              <a:spcAft>
-                <a:spcPts val="1000"/>
-              </a:spcAft>
-              <a:defRPr sz="1400">
-                <a:solidFill>
-                  <a:srgbClr val="2D2A26"/>
-                </a:solidFill>
-                <a:latin typeface="Calibri"/>
-              </a:defRPr>
-            </a:pPr>
-            <a:r>
-              <a:t>• Workspace &amp; chat</a:t>
-            </a:r>
-          </a:p>
-          <a:p>
-            <a:pPr>
-              <a:lnSpc>
-                <a:spcPct val="120000"/>
-              </a:lnSpc>
-              <a:spcAft>
-                <a:spcPts val="1000"/>
-              </a:spcAft>
-              <a:defRPr sz="1400">
-                <a:solidFill>
-                  <a:srgbClr val="2D2A26"/>
-                </a:solidFill>
-                <a:latin typeface="Calibri"/>
-              </a:defRPr>
-            </a:pPr>
-            <a:r>
-              <a:t>• Vault &amp; citations</a:t>
-            </a:r>
-          </a:p>
-          <a:p>
-            <a:pPr>
-              <a:lnSpc>
-                <a:spcPct val="120000"/>
-              </a:lnSpc>
-              <a:spcAft>
-                <a:spcPts val="1000"/>
-              </a:spcAft>
-              <a:defRPr sz="1400">
-                <a:solidFill>
-                  <a:srgbClr val="2D2A26"/>
-                </a:solidFill>
-                <a:latin typeface="Calibri"/>
-              </a:defRPr>
-            </a:pPr>
-            <a:r>
-              <a:t>• Research &amp; slides</a:t>
-            </a:r>
-          </a:p>
-          <a:p>
-            <a:pPr>
-              <a:lnSpc>
-                <a:spcPct val="120000"/>
-              </a:lnSpc>
-              <a:spcAft>
-                <a:spcPts val="1000"/>
-              </a:spcAft>
-              <a:defRPr sz="1400">
-                <a:solidFill>
-                  <a:srgbClr val="2D2A26"/>
-                </a:solidFill>
-                <a:latin typeface="Calibri"/>
-              </a:defRPr>
-            </a:pPr>
-            <a:r>
-              <a:t>• CRM contacts</a:t>
-            </a:r>
-          </a:p>
-          <a:p>
-            <a:pPr>
-              <a:lnSpc>
-                <a:spcPct val="120000"/>
-              </a:lnSpc>
-              <a:spcAft>
-                <a:spcPts val="1000"/>
-              </a:spcAft>
-              <a:defRPr sz="1400">
-                <a:solidFill>
-                  <a:srgbClr val="2D2A26"/>
-                </a:solidFill>
-                <a:latin typeface="Calibri"/>
-              </a:defRPr>
-            </a:pPr>
-            <a:r>
-              <a:t>• Standard support</a:t>
-            </a:r>
-          </a:p>
-        </p:txBody>
-      </p:sp>
-      <p:sp>
-        <p:nvSpPr>
-          <p:cNvPr id="9" name="Rounded Rectangle 8"/>
-          <p:cNvSpPr/>
-          <p:nvPr/>
-        </p:nvSpPr>
-        <p:spPr>
-          <a:xfrm>
-            <a:off x="4338218" y="1371600"/>
-            <a:ext cx="3515258" cy="4389120"/>
-          </a:xfrm>
-          <a:prstGeom prst="roundRect">
-            <a:avLst/>
-          </a:prstGeom>
-          <a:solidFill>
-            <a:srgbClr val="B14E2E"/>
-          </a:solidFill>
-          <a:ln w="25400">
-            <a:solidFill>
-              <a:srgbClr val="B14E2E"/>
-            </a:solidFill>
-          </a:ln>
-        </p:spPr>
-        <p:style>
-          <a:lnRef idx="1">
-            <a:schemeClr val="accent1"/>
-          </a:lnRef>
-          <a:fillRef idx="3">
-            <a:schemeClr val="accent1"/>
-          </a:fillRef>
-          <a:effectRef idx="2">
-            <a:schemeClr val="accent1"/>
-          </a:effectRef>
-          <a:fontRef idx="minor">
-            <a:schemeClr val="lt1"/>
-          </a:fontRef>
-        </p:style>
-        <p:txBody>
-          <a:bodyPr rtlCol="0" anchor="ctr"/>
-          <a:lstStyle/>
-          <a:p>
-            <a:pPr algn="ctr"/>
-          </a:p>
-        </p:txBody>
-      </p:sp>
-      <p:sp>
-        <p:nvSpPr>
-          <p:cNvPr id="10" name="TextBox 9"/>
-          <p:cNvSpPr txBox="1"/>
-          <p:nvPr/>
-        </p:nvSpPr>
-        <p:spPr>
-          <a:xfrm>
-            <a:off x="4475378" y="1508760"/>
-            <a:ext cx="3240938" cy="457200"/>
-          </a:xfrm>
-          <a:prstGeom prst="rect">
-            <a:avLst/>
-          </a:prstGeom>
-          <a:noFill/>
-        </p:spPr>
-        <p:txBody>
-          <a:bodyPr wrap="square">
-            <a:spAutoFit/>
-          </a:bodyPr>
-          <a:lstStyle/>
-          <a:p>
-            <a:pPr algn="ctr"/>
-            <a:r>
-              <a:rPr sz="2200" b="1">
-                <a:solidFill>
-                  <a:srgbClr val="FFFFFF"/>
-                </a:solidFill>
-                <a:latin typeface="Georgia"/>
-              </a:rPr>
-              <a:t>Pro</a:t>
-            </a:r>
-          </a:p>
-        </p:txBody>
-      </p:sp>
-      <p:sp>
-        <p:nvSpPr>
-          <p:cNvPr id="11" name="TextBox 10"/>
-          <p:cNvSpPr txBox="1"/>
-          <p:nvPr/>
-        </p:nvSpPr>
-        <p:spPr>
-          <a:xfrm>
-            <a:off x="4475378" y="2011680"/>
-            <a:ext cx="3240938" cy="548640"/>
-          </a:xfrm>
-          <a:prstGeom prst="rect">
-            <a:avLst/>
-          </a:prstGeom>
-          <a:noFill/>
-        </p:spPr>
-        <p:txBody>
-          <a:bodyPr wrap="square">
-            <a:spAutoFit/>
-          </a:bodyPr>
-          <a:lstStyle/>
-          <a:p>
-            <a:pPr algn="ctr"/>
-            <a:r>
-              <a:rPr sz="3200" b="1">
-                <a:solidFill>
-                  <a:srgbClr val="FFFFFF"/>
-                </a:solidFill>
-                <a:latin typeface="Calibri"/>
-              </a:rPr>
-              <a:t>£49</a:t>
-            </a:r>
-          </a:p>
-        </p:txBody>
-      </p:sp>
-      <p:sp>
-        <p:nvSpPr>
-          <p:cNvPr id="12" name="TextBox 11"/>
-          <p:cNvSpPr txBox="1"/>
-          <p:nvPr/>
-        </p:nvSpPr>
-        <p:spPr>
-          <a:xfrm>
-            <a:off x="4475378" y="2514600"/>
-            <a:ext cx="3240938" cy="365760"/>
-          </a:xfrm>
-          <a:prstGeom prst="rect">
-            <a:avLst/>
-          </a:prstGeom>
-          <a:noFill/>
-        </p:spPr>
-        <p:txBody>
-          <a:bodyPr wrap="square">
-            <a:spAutoFit/>
-          </a:bodyPr>
-          <a:lstStyle/>
-          <a:p>
-            <a:pPr algn="ctr"/>
-            <a:r>
-              <a:rPr sz="1200" b="0">
-                <a:solidFill>
-                  <a:srgbClr val="FFFFFF"/>
-                </a:solidFill>
-                <a:latin typeface="Calibri"/>
-              </a:rPr>
-              <a:t>/seat/mo</a:t>
-            </a:r>
-          </a:p>
-        </p:txBody>
-      </p:sp>
-      <p:sp>
-        <p:nvSpPr>
-          <p:cNvPr id="13" name="TextBox 12"/>
-          <p:cNvSpPr txBox="1"/>
-          <p:nvPr/>
-        </p:nvSpPr>
-        <p:spPr>
-          <a:xfrm>
-            <a:off x="4521098" y="2971800"/>
-            <a:ext cx="3149498" cy="2560320"/>
-          </a:xfrm>
-          <a:prstGeom prst="rect">
-            <a:avLst/>
-          </a:prstGeom>
-          <a:noFill/>
-        </p:spPr>
-        <p:txBody>
-          <a:bodyPr wrap="square" anchor="t">
-            <a:spAutoFit/>
-          </a:bodyPr>
-          <a:lstStyle/>
-          <a:p>
-            <a:pPr>
-              <a:lnSpc>
-                <a:spcPct val="120000"/>
-              </a:lnSpc>
-              <a:spcAft>
-                <a:spcPts val="1000"/>
-              </a:spcAft>
-              <a:defRPr sz="1400">
-                <a:solidFill>
-                  <a:srgbClr val="FFFFFF"/>
-                </a:solidFill>
-                <a:latin typeface="Calibri"/>
-              </a:defRPr>
-            </a:pPr>
-            <a:r>
-              <a:t>• Everything in Core</a:t>
-            </a:r>
-          </a:p>
-          <a:p>
-            <a:pPr>
-              <a:lnSpc>
-                <a:spcPct val="120000"/>
-              </a:lnSpc>
-              <a:spcAft>
-                <a:spcPts val="1000"/>
-              </a:spcAft>
-              <a:defRPr sz="1400">
-                <a:solidFill>
-                  <a:srgbClr val="FFFFFF"/>
-                </a:solidFill>
-                <a:latin typeface="Calibri"/>
-              </a:defRPr>
-            </a:pPr>
-            <a:r>
-              <a:t>• Premium reasoning</a:t>
-            </a:r>
-          </a:p>
-          <a:p>
-            <a:pPr>
-              <a:lnSpc>
-                <a:spcPct val="120000"/>
-              </a:lnSpc>
-              <a:spcAft>
-                <a:spcPts val="1000"/>
-              </a:spcAft>
-              <a:defRPr sz="1400">
-                <a:solidFill>
-                  <a:srgbClr val="FFFFFF"/>
-                </a:solidFill>
-                <a:latin typeface="Calibri"/>
-              </a:defRPr>
-            </a:pPr>
-            <a:r>
-              <a:t>• Deep research</a:t>
-            </a:r>
-          </a:p>
-          <a:p>
-            <a:pPr>
-              <a:lnSpc>
-                <a:spcPct val="120000"/>
-              </a:lnSpc>
-              <a:spcAft>
-                <a:spcPts val="1000"/>
-              </a:spcAft>
-              <a:defRPr sz="1400">
-                <a:solidFill>
-                  <a:srgbClr val="FFFFFF"/>
-                </a:solidFill>
-                <a:latin typeface="Calibri"/>
-              </a:defRPr>
-            </a:pPr>
-            <a:r>
-              <a:t>• Advanced reporting</a:t>
-            </a:r>
-          </a:p>
-          <a:p>
-            <a:pPr>
-              <a:lnSpc>
-                <a:spcPct val="120000"/>
-              </a:lnSpc>
-              <a:spcAft>
-                <a:spcPts val="1000"/>
-              </a:spcAft>
-              <a:defRPr sz="1400">
-                <a:solidFill>
-                  <a:srgbClr val="FFFFFF"/>
-                </a:solidFill>
-                <a:latin typeface="Calibri"/>
-              </a:defRPr>
-            </a:pPr>
-            <a:r>
-              <a:t>• Priority support</a:t>
-            </a:r>
-          </a:p>
-        </p:txBody>
-      </p:sp>
-      <p:sp>
-        <p:nvSpPr>
-          <p:cNvPr id="14" name="Rounded Rectangle 13"/>
-          <p:cNvSpPr/>
-          <p:nvPr/>
-        </p:nvSpPr>
-        <p:spPr>
-          <a:xfrm>
-            <a:off x="8127796" y="1371600"/>
-            <a:ext cx="3515258" cy="4389120"/>
-          </a:xfrm>
-          <a:prstGeom prst="roundRect">
-            <a:avLst/>
-          </a:prstGeom>
-          <a:solidFill>
-            <a:srgbClr val="F6F2ED"/>
-          </a:solidFill>
-          <a:ln w="25400">
-            <a:solidFill>
-              <a:srgbClr val="B14E2E"/>
-            </a:solidFill>
-          </a:ln>
-        </p:spPr>
-        <p:style>
-          <a:lnRef idx="1">
-            <a:schemeClr val="accent1"/>
-          </a:lnRef>
-          <a:fillRef idx="3">
-            <a:schemeClr val="accent1"/>
-          </a:fillRef>
-          <a:effectRef idx="2">
-            <a:schemeClr val="accent1"/>
-          </a:effectRef>
-          <a:fontRef idx="minor">
-            <a:schemeClr val="lt1"/>
-          </a:fontRef>
-        </p:style>
-        <p:txBody>
-          <a:bodyPr rtlCol="0" anchor="ctr"/>
-          <a:lstStyle/>
-          <a:p>
-            <a:pPr algn="ctr"/>
-          </a:p>
-        </p:txBody>
-      </p:sp>
-      <p:sp>
-        <p:nvSpPr>
-          <p:cNvPr id="15" name="TextBox 14"/>
-          <p:cNvSpPr txBox="1"/>
-          <p:nvPr/>
-        </p:nvSpPr>
-        <p:spPr>
-          <a:xfrm>
-            <a:off x="8264956" y="1508760"/>
-            <a:ext cx="3240938" cy="457200"/>
-          </a:xfrm>
-          <a:prstGeom prst="rect">
-            <a:avLst/>
-          </a:prstGeom>
-          <a:noFill/>
-        </p:spPr>
-        <p:txBody>
-          <a:bodyPr wrap="square">
-            <a:spAutoFit/>
-          </a:bodyPr>
-          <a:lstStyle/>
-          <a:p>
-            <a:pPr algn="ctr"/>
-            <a:r>
-              <a:rPr sz="2200" b="1">
-                <a:solidFill>
-                  <a:srgbClr val="B14E2E"/>
-                </a:solidFill>
-                <a:latin typeface="Georgia"/>
-              </a:rPr>
-              <a:t>Managed</a:t>
-            </a:r>
-          </a:p>
-        </p:txBody>
-      </p:sp>
-      <p:sp>
-        <p:nvSpPr>
-          <p:cNvPr id="16" name="TextBox 15"/>
-          <p:cNvSpPr txBox="1"/>
-          <p:nvPr/>
-        </p:nvSpPr>
-        <p:spPr>
-          <a:xfrm>
-            <a:off x="8264956" y="2011680"/>
-            <a:ext cx="3240938" cy="548640"/>
-          </a:xfrm>
-          <a:prstGeom prst="rect">
-            <a:avLst/>
-          </a:prstGeom>
-          <a:noFill/>
-        </p:spPr>
-        <p:txBody>
-          <a:bodyPr wrap="square">
-            <a:spAutoFit/>
-          </a:bodyPr>
-          <a:lstStyle/>
-          <a:p>
-            <a:pPr algn="ctr"/>
-            <a:r>
-              <a:rPr sz="3200" b="1">
-                <a:solidFill>
-                  <a:srgbClr val="B14E2E"/>
-                </a:solidFill>
-                <a:latin typeface="Calibri"/>
-              </a:rPr>
-              <a:t>£799</a:t>
-            </a:r>
-          </a:p>
-        </p:txBody>
-      </p:sp>
-      <p:sp>
-        <p:nvSpPr>
-          <p:cNvPr id="17" name="TextBox 16"/>
-          <p:cNvSpPr txBox="1"/>
-          <p:nvPr/>
-        </p:nvSpPr>
-        <p:spPr>
-          <a:xfrm>
-            <a:off x="8264956" y="2514600"/>
-            <a:ext cx="3240938" cy="365760"/>
-          </a:xfrm>
-          <a:prstGeom prst="rect">
-            <a:avLst/>
-          </a:prstGeom>
-          <a:noFill/>
-        </p:spPr>
-        <p:txBody>
-          <a:bodyPr wrap="square">
-            <a:spAutoFit/>
-          </a:bodyPr>
-          <a:lstStyle/>
-          <a:p>
-            <a:pPr algn="ctr"/>
-            <a:r>
-              <a:rPr sz="1200" b="0">
-                <a:solidFill>
-                  <a:srgbClr val="2D2A26"/>
-                </a:solidFill>
-                <a:latin typeface="Calibri"/>
-              </a:rPr>
-              <a:t>/mo + £1,500 onboarding</a:t>
-            </a:r>
-          </a:p>
-        </p:txBody>
-      </p:sp>
-      <p:sp>
-        <p:nvSpPr>
-          <p:cNvPr id="18" name="TextBox 17"/>
-          <p:cNvSpPr txBox="1"/>
-          <p:nvPr/>
-        </p:nvSpPr>
-        <p:spPr>
-          <a:xfrm>
-            <a:off x="8310676" y="2971800"/>
-            <a:ext cx="3149498" cy="2560320"/>
-          </a:xfrm>
-          <a:prstGeom prst="rect">
-            <a:avLst/>
-          </a:prstGeom>
-          <a:noFill/>
-        </p:spPr>
-        <p:txBody>
-          <a:bodyPr wrap="square" anchor="t">
-            <a:spAutoFit/>
-          </a:bodyPr>
-          <a:lstStyle/>
-          <a:p>
-            <a:pPr>
-              <a:lnSpc>
-                <a:spcPct val="120000"/>
-              </a:lnSpc>
-              <a:spcAft>
-                <a:spcPts val="1000"/>
-              </a:spcAft>
-              <a:defRPr sz="1400">
-                <a:solidFill>
-                  <a:srgbClr val="2D2A26"/>
-                </a:solidFill>
-                <a:latin typeface="Calibri"/>
-              </a:defRPr>
-            </a:pPr>
-            <a:r>
-              <a:t>• Includes 10 Pro seats</a:t>
-            </a:r>
-          </a:p>
-          <a:p>
-            <a:pPr>
-              <a:lnSpc>
-                <a:spcPct val="120000"/>
-              </a:lnSpc>
-              <a:spcAft>
-                <a:spcPts val="1000"/>
-              </a:spcAft>
-              <a:defRPr sz="1400">
-                <a:solidFill>
-                  <a:srgbClr val="2D2A26"/>
-                </a:solidFill>
-                <a:latin typeface="Calibri"/>
-              </a:defRPr>
-            </a:pPr>
-            <a:r>
-              <a:t>• White-glove onboarding</a:t>
-            </a:r>
-          </a:p>
-          <a:p>
-            <a:pPr>
-              <a:lnSpc>
-                <a:spcPct val="120000"/>
-              </a:lnSpc>
-              <a:spcAft>
-                <a:spcPts val="1000"/>
-              </a:spcAft>
-              <a:defRPr sz="1400">
-                <a:solidFill>
-                  <a:srgbClr val="2D2A26"/>
-                </a:solidFill>
-                <a:latin typeface="Calibri"/>
-              </a:defRPr>
-            </a:pPr>
-            <a:r>
-              <a:t>• Custom workflows</a:t>
-            </a:r>
-          </a:p>
-          <a:p>
-            <a:pPr>
-              <a:lnSpc>
-                <a:spcPct val="120000"/>
-              </a:lnSpc>
-              <a:spcAft>
-                <a:spcPts val="1000"/>
-              </a:spcAft>
-              <a:defRPr sz="1400">
-                <a:solidFill>
-                  <a:srgbClr val="2D2A26"/>
-                </a:solidFill>
-                <a:latin typeface="Calibri"/>
-              </a:defRPr>
-            </a:pPr>
-            <a:r>
-              <a:t>• Quarterly reviews</a:t>
-            </a:r>
-          </a:p>
-          <a:p>
-            <a:pPr>
-              <a:lnSpc>
-                <a:spcPct val="120000"/>
-              </a:lnSpc>
-              <a:spcAft>
-                <a:spcPts val="1000"/>
-              </a:spcAft>
-              <a:defRPr sz="1400">
-                <a:solidFill>
-                  <a:srgbClr val="2D2A26"/>
-                </a:solidFill>
-                <a:latin typeface="Calibri"/>
-              </a:defRPr>
-            </a:pPr>
-            <a:r>
-              <a:t>• +£39/extra seat</a:t>
-            </a:r>
-          </a:p>
-        </p:txBody>
-      </p:sp>
-      <p:sp>
-        <p:nvSpPr>
-          <p:cNvPr id="19" name="TextBox 18"/>
           <p:cNvSpPr txBox="1"/>
           <p:nvPr/>
         </p:nvSpPr>
@@ -5346,7 +4429,7 @@
                 </a:solidFill>
                 <a:latin typeface="Georgia"/>
               </a:rPr>
-              <a:t>See your workspace before you commit.</a:t>
+              <a:t>Bring one repeated workflow.</a:t>
             </a:r>
           </a:p>
         </p:txBody>
@@ -5381,7 +4464,7 @@
                 </a:solidFill>
                 <a:latin typeface="Calibri"/>
               </a:rPr>
-              <a:t>Book a 20-minute demo and we’ll build a live workspace around your own documents.</a:t>
+              <a:t>We’ll show you how it fits: a 20-minute demo around a report, bid or return you already produce. No slides, no signup.</a:t>
             </a:r>
           </a:p>
         </p:txBody>
@@ -5416,7 +4499,7 @@
                 </a:solidFill>
                 <a:latin typeface="Calibri"/>
               </a:rPr>
-              <a:t>hello@flowgridos.co.uk · 14-day trial, no card required</a:t>
+              <a:t>clive@platform91.com · or join the pilot list at flowgridos.co.uk</a:t>
             </a:r>
           </a:p>
         </p:txBody>

--- a/docs/flowgrid-os-customer-deck.pptx
+++ b/docs/flowgrid-os-customer-deck.pptx
@@ -10,7 +10,7 @@
     <p:sldId id="258" r:id="rId9"/>
     <p:sldId id="259" r:id="rId10"/>
     <p:sldId id="260" r:id="rId11"/>
-    <p:sldId id="262" r:id="rId13"/>
+    <p:sldId id="261" r:id="rId12"/>
   </p:sldIdLst>
   <p:sldSz cx="12191695" cy="6858000" type="screen4x3"/>
   <p:notesSz cx="6858000" cy="9144000"/>
@@ -3953,29 +3953,6 @@
               <a:t>• Projects and plans with stages, budgets and risks</a:t>
             </a:r>
           </a:p>
-        </p:txBody>
-      </p:sp>
-      <p:sp>
-        <p:nvSpPr>
-          <p:cNvPr id="5" name="TextBox 4"/>
-          <p:cNvSpPr txBox="1"/>
-          <p:nvPr/>
-        </p:nvSpPr>
-        <p:spPr>
-          <a:xfrm>
-            <a:off x="6278727" y="1371600"/>
-            <a:ext cx="5364327" cy="4937760"/>
-          </a:xfrm>
-          <a:prstGeom prst="rect">
-            <a:avLst/>
-          </a:prstGeom>
-          <a:noFill/>
-        </p:spPr>
-        <p:txBody>
-          <a:bodyPr wrap="square" anchor="t">
-            <a:spAutoFit/>
-          </a:bodyPr>
-          <a:lstStyle/>
           <a:p>
             <a:pPr>
               <a:lnSpc>
@@ -3995,6 +3972,29 @@
               <a:t>• Branded exports: PDF and editable PowerPoint</a:t>
             </a:r>
           </a:p>
+        </p:txBody>
+      </p:sp>
+      <p:sp>
+        <p:nvSpPr>
+          <p:cNvPr id="5" name="TextBox 4"/>
+          <p:cNvSpPr txBox="1"/>
+          <p:nvPr/>
+        </p:nvSpPr>
+        <p:spPr>
+          <a:xfrm>
+            <a:off x="6278727" y="1371600"/>
+            <a:ext cx="5364327" cy="4937760"/>
+          </a:xfrm>
+          <a:prstGeom prst="rect">
+            <a:avLst/>
+          </a:prstGeom>
+          <a:noFill/>
+        </p:spPr>
+        <p:txBody>
+          <a:bodyPr wrap="square" anchor="t">
+            <a:spAutoFit/>
+          </a:bodyPr>
+          <a:lstStyle/>
           <a:p>
             <a:pPr>
               <a:lnSpc>
@@ -4011,7 +4011,7 @@
               </a:defRPr>
             </a:pPr>
             <a:r>
-              <a:t>• Research mode with cited web sources</a:t>
+              <a:t>• Research mode: reads the web pages, not just the links, and cites each source</a:t>
             </a:r>
           </a:p>
           <a:p>
@@ -4346,7 +4346,7 @@
 </p:sld>
 </file>
 
-<file path=ppt/slides/slide7.xml><?xml version="1.0" encoding="utf-8"?>
+<file path=ppt/slides/slide6.xml><?xml version="1.0" encoding="utf-8"?>
 <p:sld xmlns:a="http://schemas.openxmlformats.org/drawingml/2006/main" xmlns:p="http://schemas.openxmlformats.org/presentationml/2006/main" xmlns:r="http://schemas.openxmlformats.org/officeDocument/2006/relationships">
   <p:cSld>
     <p:spTree>

--- a/docs/flowgrid-os-customer-deck.pptx
+++ b/docs/flowgrid-os-customer-deck.pptx
@@ -4260,7 +4260,7 @@
               </a:defRPr>
             </a:pPr>
             <a:r>
-              <a:t>• UK-held data. Zero-data-retention hosting by default; your documents are not used to train anyone’s models.</a:t>
+              <a:t>• Zero-data-retention hosting by default; your documents are not used to train anyone’s models.</a:t>
             </a:r>
           </a:p>
           <a:p>
@@ -4279,7 +4279,7 @@
               </a:defRPr>
             </a:pPr>
             <a:r>
-              <a:t>• UK GDPR, with a Data Processing Agreement as part of your terms, plus standard-format export and agreed return and deletion.</a:t>
+              <a:t>• UK GDPR, with a Data Processing Agreement that names where your data is hosted, plus standard-format export and agreed return and deletion.</a:t>
             </a:r>
           </a:p>
           <a:p>

--- a/docs/flowgrid-os-customer-deck.pptx
+++ b/docs/flowgrid-os-customer-deck.pptx
@@ -4499,7 +4499,7 @@
                 </a:solidFill>
                 <a:latin typeface="Calibri"/>
               </a:rPr>
-              <a:t>clive@platform91.com · or join the pilot list at flowgridos.co.uk</a:t>
+              <a:t>hello@flowgridos.co.uk · or join the pilot list at flowgridos.co.uk</a:t>
             </a:r>
           </a:p>
         </p:txBody>

--- a/docs/flowgrid-os-customer-deck.pptx
+++ b/docs/flowgrid-os-customer-deck.pptx
@@ -11,6 +11,7 @@
     <p:sldId id="259" r:id="rId10"/>
     <p:sldId id="260" r:id="rId11"/>
     <p:sldId id="261" r:id="rId12"/>
+    <p:sldId id="262" r:id="rId13"/>
   </p:sldIdLst>
   <p:sldSz cx="12191695" cy="6858000" type="screen4x3"/>
   <p:notesSz cx="6858000" cy="9144000"/>
@@ -3682,7 +3683,7 @@
               </a:defRPr>
             </a:pPr>
             <a:r>
-              <a:t>• Answers cite the document and page, and say so plainly when the vault has nothing.</a:t>
+              <a:t>• Answers cite the document and page, and say so plainly when your documents don't hold the answer.</a:t>
             </a:r>
           </a:p>
           <a:p>
@@ -3701,7 +3702,26 @@
               </a:defRPr>
             </a:pPr>
             <a:r>
-              <a:t>• Confirm a fact once and every draft reuses it; projects carry stages, budgets and risks.</a:t>
+              <a:t>• Confirm a fact once and every draft reuses it.</a:t>
+            </a:r>
+          </a:p>
+          <a:p>
+            <a:pPr>
+              <a:lnSpc>
+                <a:spcPct val="120000"/>
+              </a:lnSpc>
+              <a:spcAft>
+                <a:spcPts val="1000"/>
+              </a:spcAft>
+              <a:defRPr sz="2200">
+                <a:solidFill>
+                  <a:srgbClr val="2D2A26"/>
+                </a:solidFill>
+                <a:latin typeface="Calibri"/>
+              </a:defRPr>
+            </a:pPr>
+            <a:r>
+              <a:t>• Every project comes with scoped chat, its documents and a plan of owned tasks; modules add stage gates, budgets and risks, or grant records.</a:t>
             </a:r>
           </a:p>
           <a:p>
@@ -3912,7 +3932,7 @@
               </a:defRPr>
             </a:pPr>
             <a:r>
-              <a:t>• Document vault (PDF, Word, Excel), searchable</a:t>
+              <a:t>• Documents (PDF, Word, Excel), searchable</a:t>
             </a:r>
           </a:p>
           <a:p>
@@ -3950,7 +3970,7 @@
               </a:defRPr>
             </a:pPr>
             <a:r>
-              <a:t>• Projects and plans with stages, budgets and risks</a:t>
+              <a:t>• Projects and plans: chat, documents and owned tasks on every project</a:t>
             </a:r>
           </a:p>
           <a:p>
@@ -4030,7 +4050,7 @@
               </a:defRPr>
             </a:pPr>
             <a:r>
-              <a:t>• Contact book with spreadsheet import</a:t>
+              <a:t>• Contacts with spreadsheet import, as a tab on any project</a:t>
             </a:r>
           </a:p>
           <a:p>
@@ -4199,7 +4219,7 @@
                 </a:solidFill>
                 <a:latin typeface="Georgia"/>
               </a:rPr>
-              <a:t>Privacy &amp; trust</a:t>
+              <a:t>Built for your sector</a:t>
             </a:r>
           </a:p>
         </p:txBody>
@@ -4241,7 +4261,7 @@
               </a:defRPr>
             </a:pPr>
             <a:r>
-              <a:t>• Your workspace is isolated from every other customer at the database level, not only by application code.</a:t>
+              <a:t>• The core platform (documents, confirmed facts and projects) is always included.</a:t>
             </a:r>
           </a:p>
           <a:p>
@@ -4260,7 +4280,7 @@
               </a:defRPr>
             </a:pPr>
             <a:r>
-              <a:t>• Zero-data-retention hosting by default; your documents are not used to train anyone’s models.</a:t>
+              <a:t>• Switch on a module and projects gain what your sector needs.</a:t>
             </a:r>
           </a:p>
           <a:p>
@@ -4279,7 +4299,7 @@
               </a:defRPr>
             </a:pPr>
             <a:r>
-              <a:t>• UK GDPR, with a Data Processing Agreement that names where your data is hosted, plus standard-format export and agreed return and deletion.</a:t>
+              <a:t>• Groundwork · Development projects: stage gates, funding, budget, risk and planning records, with client reports drafted from live records. Available in pilot.</a:t>
             </a:r>
           </a:p>
           <a:p>
@@ -4298,7 +4318,26 @@
               </a:defRPr>
             </a:pPr>
             <a:r>
-              <a:t>• Every AI call is recorded with usage and cost, and spending limits keep invoices predictable.</a:t>
+              <a:t>• Grantwork · Grant funding: applications, award conditions, impact evidence and monitoring returns, as a tab on any project. Available in pilot.</a:t>
+            </a:r>
+          </a:p>
+          <a:p>
+            <a:pPr>
+              <a:lnSpc>
+                <a:spcPct val="120000"/>
+              </a:lnSpc>
+              <a:spcAft>
+                <a:spcPts val="1000"/>
+              </a:spcAft>
+              <a:defRPr sz="2200">
+                <a:solidFill>
+                  <a:srgbClr val="2D2A26"/>
+                </a:solidFill>
+                <a:latin typeface="Calibri"/>
+              </a:defRPr>
+            </a:pPr>
+            <a:r>
+              <a:t>• Contacts: organisations and people linked to any project.</a:t>
             </a:r>
           </a:p>
         </p:txBody>
@@ -4347,6 +4386,236 @@
 </file>
 
 <file path=ppt/slides/slide6.xml><?xml version="1.0" encoding="utf-8"?>
+<p:sld xmlns:a="http://schemas.openxmlformats.org/drawingml/2006/main" xmlns:p="http://schemas.openxmlformats.org/presentationml/2006/main" xmlns:r="http://schemas.openxmlformats.org/officeDocument/2006/relationships">
+  <p:cSld>
+    <p:spTree>
+      <p:nvGrpSpPr>
+        <p:cNvPr id="1" name=""/>
+        <p:cNvGrpSpPr/>
+        <p:nvPr/>
+      </p:nvGrpSpPr>
+      <p:grpSpPr/>
+      <p:sp>
+        <p:nvSpPr>
+          <p:cNvPr id="2" name="Rectangle 1"/>
+          <p:cNvSpPr/>
+          <p:nvPr/>
+        </p:nvSpPr>
+        <p:spPr>
+          <a:xfrm>
+            <a:off x="0" y="0"/>
+            <a:ext cx="12191695" cy="1005840"/>
+          </a:xfrm>
+          <a:prstGeom prst="rect">
+            <a:avLst/>
+          </a:prstGeom>
+          <a:solidFill>
+            <a:srgbClr val="B14E2E"/>
+          </a:solidFill>
+          <a:ln>
+            <a:noFill/>
+          </a:ln>
+        </p:spPr>
+        <p:style>
+          <a:lnRef idx="1">
+            <a:schemeClr val="accent1"/>
+          </a:lnRef>
+          <a:fillRef idx="3">
+            <a:schemeClr val="accent1"/>
+          </a:fillRef>
+          <a:effectRef idx="2">
+            <a:schemeClr val="accent1"/>
+          </a:effectRef>
+          <a:fontRef idx="minor">
+            <a:schemeClr val="lt1"/>
+          </a:fontRef>
+        </p:style>
+        <p:txBody>
+          <a:bodyPr rtlCol="0" anchor="ctr"/>
+          <a:lstStyle/>
+          <a:p>
+            <a:pPr algn="ctr"/>
+          </a:p>
+        </p:txBody>
+      </p:sp>
+      <p:sp>
+        <p:nvSpPr>
+          <p:cNvPr id="3" name="TextBox 2"/>
+          <p:cNvSpPr txBox="1"/>
+          <p:nvPr/>
+        </p:nvSpPr>
+        <p:spPr>
+          <a:xfrm>
+            <a:off x="548640" y="201168"/>
+            <a:ext cx="11094415" cy="731520"/>
+          </a:xfrm>
+          <a:prstGeom prst="rect">
+            <a:avLst/>
+          </a:prstGeom>
+          <a:noFill/>
+        </p:spPr>
+        <p:txBody>
+          <a:bodyPr wrap="square">
+            <a:spAutoFit/>
+          </a:bodyPr>
+          <a:lstStyle/>
+          <a:p>
+            <a:pPr algn="l"/>
+            <a:r>
+              <a:rPr sz="3400" b="1">
+                <a:solidFill>
+                  <a:srgbClr val="FFFFFF"/>
+                </a:solidFill>
+                <a:latin typeface="Georgia"/>
+              </a:rPr>
+              <a:t>Privacy &amp; trust</a:t>
+            </a:r>
+          </a:p>
+        </p:txBody>
+      </p:sp>
+      <p:sp>
+        <p:nvSpPr>
+          <p:cNvPr id="4" name="TextBox 3"/>
+          <p:cNvSpPr txBox="1"/>
+          <p:nvPr/>
+        </p:nvSpPr>
+        <p:spPr>
+          <a:xfrm>
+            <a:off x="548640" y="1325880"/>
+            <a:ext cx="11094415" cy="5120640"/>
+          </a:xfrm>
+          <a:prstGeom prst="rect">
+            <a:avLst/>
+          </a:prstGeom>
+          <a:noFill/>
+        </p:spPr>
+        <p:txBody>
+          <a:bodyPr wrap="square" anchor="t">
+            <a:spAutoFit/>
+          </a:bodyPr>
+          <a:lstStyle/>
+          <a:p>
+            <a:pPr>
+              <a:lnSpc>
+                <a:spcPct val="120000"/>
+              </a:lnSpc>
+              <a:spcAft>
+                <a:spcPts val="1000"/>
+              </a:spcAft>
+              <a:defRPr sz="2200">
+                <a:solidFill>
+                  <a:srgbClr val="2D2A26"/>
+                </a:solidFill>
+                <a:latin typeface="Calibri"/>
+              </a:defRPr>
+            </a:pPr>
+            <a:r>
+              <a:t>• Your workspace is isolated from every other customer at the database level, not only by application code.</a:t>
+            </a:r>
+          </a:p>
+          <a:p>
+            <a:pPr>
+              <a:lnSpc>
+                <a:spcPct val="120000"/>
+              </a:lnSpc>
+              <a:spcAft>
+                <a:spcPts val="1000"/>
+              </a:spcAft>
+              <a:defRPr sz="2200">
+                <a:solidFill>
+                  <a:srgbClr val="2D2A26"/>
+                </a:solidFill>
+                <a:latin typeface="Calibri"/>
+              </a:defRPr>
+            </a:pPr>
+            <a:r>
+              <a:t>• Zero-data-retention hosting by default; your documents are not used to train anyone’s models.</a:t>
+            </a:r>
+          </a:p>
+          <a:p>
+            <a:pPr>
+              <a:lnSpc>
+                <a:spcPct val="120000"/>
+              </a:lnSpc>
+              <a:spcAft>
+                <a:spcPts val="1000"/>
+              </a:spcAft>
+              <a:defRPr sz="2200">
+                <a:solidFill>
+                  <a:srgbClr val="2D2A26"/>
+                </a:solidFill>
+                <a:latin typeface="Calibri"/>
+              </a:defRPr>
+            </a:pPr>
+            <a:r>
+              <a:t>• UK GDPR, with a Data Processing Agreement that names where your data is hosted, plus standard-format export and agreed return and deletion.</a:t>
+            </a:r>
+          </a:p>
+          <a:p>
+            <a:pPr>
+              <a:lnSpc>
+                <a:spcPct val="120000"/>
+              </a:lnSpc>
+              <a:spcAft>
+                <a:spcPts val="1000"/>
+              </a:spcAft>
+              <a:defRPr sz="2200">
+                <a:solidFill>
+                  <a:srgbClr val="2D2A26"/>
+                </a:solidFill>
+                <a:latin typeface="Calibri"/>
+              </a:defRPr>
+            </a:pPr>
+            <a:r>
+              <a:t>• Every AI call is recorded with usage and cost, and spending limits keep invoices predictable.</a:t>
+            </a:r>
+          </a:p>
+        </p:txBody>
+      </p:sp>
+      <p:sp>
+        <p:nvSpPr>
+          <p:cNvPr id="5" name="TextBox 4"/>
+          <p:cNvSpPr txBox="1"/>
+          <p:nvPr/>
+        </p:nvSpPr>
+        <p:spPr>
+          <a:xfrm>
+            <a:off x="548640" y="6537960"/>
+            <a:ext cx="11094415" cy="228600"/>
+          </a:xfrm>
+          <a:prstGeom prst="rect">
+            <a:avLst/>
+          </a:prstGeom>
+          <a:noFill/>
+        </p:spPr>
+        <p:txBody>
+          <a:bodyPr wrap="square">
+            <a:spAutoFit/>
+          </a:bodyPr>
+          <a:lstStyle/>
+          <a:p>
+            <a:pPr algn="r"/>
+            <a:r>
+              <a:rPr sz="1000" b="0">
+                <a:solidFill>
+                  <a:srgbClr val="5B5752"/>
+                </a:solidFill>
+                <a:latin typeface="Calibri"/>
+              </a:rPr>
+              <a:t>flowgridos.co.uk</a:t>
+            </a:r>
+          </a:p>
+        </p:txBody>
+      </p:sp>
+    </p:spTree>
+  </p:cSld>
+  <p:clrMapOvr>
+    <a:masterClrMapping/>
+  </p:clrMapOvr>
+</p:sld>
+</file>
+
+<file path=ppt/slides/slide7.xml><?xml version="1.0" encoding="utf-8"?>
 <p:sld xmlns:a="http://schemas.openxmlformats.org/drawingml/2006/main" xmlns:p="http://schemas.openxmlformats.org/presentationml/2006/main" xmlns:r="http://schemas.openxmlformats.org/officeDocument/2006/relationships">
   <p:cSld>
     <p:spTree>

--- a/docs/flowgrid-os-customer-deck.pptx
+++ b/docs/flowgrid-os-customer-deck.pptx
@@ -3721,7 +3721,7 @@
               </a:defRPr>
             </a:pPr>
             <a:r>
-              <a:t>• Every project comes with scoped chat, its documents and a plan of owned tasks; modules add stage gates, budgets and risks, or grant records.</a:t>
+              <a:t>• Every project comes with scoped chat, its documents and an optional plan of owned tasks; modules add stage gates, budgets and risks, or grant records.</a:t>
             </a:r>
           </a:p>
           <a:p>
@@ -3970,7 +3970,7 @@
               </a:defRPr>
             </a:pPr>
             <a:r>
-              <a:t>• Projects and plans: chat, documents and owned tasks on every project</a:t>
+              <a:t>• Projects and plans: chat and documents on every project, with an optional plan of owned tasks</a:t>
             </a:r>
           </a:p>
           <a:p>

--- a/docs/flowgrid-os-customer-deck.pptx
+++ b/docs/flowgrid-os-customer-deck.pptx
@@ -11,6 +11,7 @@
     <p:sldId id="259" r:id="rId10"/>
     <p:sldId id="260" r:id="rId11"/>
     <p:sldId id="261" r:id="rId12"/>
+    <p:sldId id="262" r:id="rId13"/>
   </p:sldIdLst>
   <p:sldSz cx="12191695" cy="6858000" type="screen4x3"/>
   <p:notesSz cx="6858000" cy="9144000"/>
@@ -3682,7 +3683,7 @@
               </a:defRPr>
             </a:pPr>
             <a:r>
-              <a:t>• Answers cite the document and page, and say so plainly when the vault has nothing.</a:t>
+              <a:t>• Answers cite the document and page, and say so plainly when your documents don't hold the answer.</a:t>
             </a:r>
           </a:p>
           <a:p>
@@ -3701,7 +3702,26 @@
               </a:defRPr>
             </a:pPr>
             <a:r>
-              <a:t>• Confirm a fact once and every draft reuses it; projects carry stages, budgets and risks.</a:t>
+              <a:t>• Confirm a fact once and every draft reuses it.</a:t>
+            </a:r>
+          </a:p>
+          <a:p>
+            <a:pPr>
+              <a:lnSpc>
+                <a:spcPct val="120000"/>
+              </a:lnSpc>
+              <a:spcAft>
+                <a:spcPts val="1000"/>
+              </a:spcAft>
+              <a:defRPr sz="2200">
+                <a:solidFill>
+                  <a:srgbClr val="2D2A26"/>
+                </a:solidFill>
+                <a:latin typeface="Calibri"/>
+              </a:defRPr>
+            </a:pPr>
+            <a:r>
+              <a:t>• Every project comes with scoped chat, its documents and an optional plan of owned tasks; modules add stage gates, budgets and risks, or grant records.</a:t>
             </a:r>
           </a:p>
           <a:p>
@@ -3912,7 +3932,7 @@
               </a:defRPr>
             </a:pPr>
             <a:r>
-              <a:t>• Document vault (PDF, Word, Excel), searchable</a:t>
+              <a:t>• Documents (PDF, Word, Excel), searchable</a:t>
             </a:r>
           </a:p>
           <a:p>
@@ -3950,7 +3970,7 @@
               </a:defRPr>
             </a:pPr>
             <a:r>
-              <a:t>• Projects and plans with stages, budgets and risks</a:t>
+              <a:t>• Projects and plans: chat and documents on every project, with an optional plan of owned tasks</a:t>
             </a:r>
           </a:p>
           <a:p>
@@ -4030,7 +4050,7 @@
               </a:defRPr>
             </a:pPr>
             <a:r>
-              <a:t>• Contact book with spreadsheet import</a:t>
+              <a:t>• Contacts with spreadsheet import, as a tab on any project</a:t>
             </a:r>
           </a:p>
           <a:p>
@@ -4199,7 +4219,7 @@
                 </a:solidFill>
                 <a:latin typeface="Georgia"/>
               </a:rPr>
-              <a:t>Privacy &amp; trust</a:t>
+              <a:t>Built for your sector</a:t>
             </a:r>
           </a:p>
         </p:txBody>
@@ -4241,7 +4261,7 @@
               </a:defRPr>
             </a:pPr>
             <a:r>
-              <a:t>• Your workspace is isolated from every other customer at the database level, not only by application code.</a:t>
+              <a:t>• The core platform (documents, confirmed facts and projects) is always included.</a:t>
             </a:r>
           </a:p>
           <a:p>
@@ -4260,7 +4280,7 @@
               </a:defRPr>
             </a:pPr>
             <a:r>
-              <a:t>• Zero-data-retention hosting by default; your documents are not used to train anyone’s models.</a:t>
+              <a:t>• Switch on a module and projects gain what your sector needs.</a:t>
             </a:r>
           </a:p>
           <a:p>
@@ -4279,7 +4299,7 @@
               </a:defRPr>
             </a:pPr>
             <a:r>
-              <a:t>• UK GDPR, with a Data Processing Agreement that names where your data is hosted, plus standard-format export and agreed return and deletion.</a:t>
+              <a:t>• Groundwork · Development projects: stage gates, funding, budget, risk and planning records, with client reports drafted from live records. Available in pilot.</a:t>
             </a:r>
           </a:p>
           <a:p>
@@ -4298,7 +4318,26 @@
               </a:defRPr>
             </a:pPr>
             <a:r>
-              <a:t>• Every AI call is recorded with usage and cost, and spending limits keep invoices predictable.</a:t>
+              <a:t>• Grantwork · Grant funding: applications, award conditions, impact evidence and monitoring returns, as a tab on any project. Available in pilot.</a:t>
+            </a:r>
+          </a:p>
+          <a:p>
+            <a:pPr>
+              <a:lnSpc>
+                <a:spcPct val="120000"/>
+              </a:lnSpc>
+              <a:spcAft>
+                <a:spcPts val="1000"/>
+              </a:spcAft>
+              <a:defRPr sz="2200">
+                <a:solidFill>
+                  <a:srgbClr val="2D2A26"/>
+                </a:solidFill>
+                <a:latin typeface="Calibri"/>
+              </a:defRPr>
+            </a:pPr>
+            <a:r>
+              <a:t>• Contacts: organisations and people linked to any project.</a:t>
             </a:r>
           </a:p>
         </p:txBody>
@@ -4347,6 +4386,236 @@
 </file>
 
 <file path=ppt/slides/slide6.xml><?xml version="1.0" encoding="utf-8"?>
+<p:sld xmlns:a="http://schemas.openxmlformats.org/drawingml/2006/main" xmlns:p="http://schemas.openxmlformats.org/presentationml/2006/main" xmlns:r="http://schemas.openxmlformats.org/officeDocument/2006/relationships">
+  <p:cSld>
+    <p:spTree>
+      <p:nvGrpSpPr>
+        <p:cNvPr id="1" name=""/>
+        <p:cNvGrpSpPr/>
+        <p:nvPr/>
+      </p:nvGrpSpPr>
+      <p:grpSpPr/>
+      <p:sp>
+        <p:nvSpPr>
+          <p:cNvPr id="2" name="Rectangle 1"/>
+          <p:cNvSpPr/>
+          <p:nvPr/>
+        </p:nvSpPr>
+        <p:spPr>
+          <a:xfrm>
+            <a:off x="0" y="0"/>
+            <a:ext cx="12191695" cy="1005840"/>
+          </a:xfrm>
+          <a:prstGeom prst="rect">
+            <a:avLst/>
+          </a:prstGeom>
+          <a:solidFill>
+            <a:srgbClr val="B14E2E"/>
+          </a:solidFill>
+          <a:ln>
+            <a:noFill/>
+          </a:ln>
+        </p:spPr>
+        <p:style>
+          <a:lnRef idx="1">
+            <a:schemeClr val="accent1"/>
+          </a:lnRef>
+          <a:fillRef idx="3">
+            <a:schemeClr val="accent1"/>
+          </a:fillRef>
+          <a:effectRef idx="2">
+            <a:schemeClr val="accent1"/>
+          </a:effectRef>
+          <a:fontRef idx="minor">
+            <a:schemeClr val="lt1"/>
+          </a:fontRef>
+        </p:style>
+        <p:txBody>
+          <a:bodyPr rtlCol="0" anchor="ctr"/>
+          <a:lstStyle/>
+          <a:p>
+            <a:pPr algn="ctr"/>
+          </a:p>
+        </p:txBody>
+      </p:sp>
+      <p:sp>
+        <p:nvSpPr>
+          <p:cNvPr id="3" name="TextBox 2"/>
+          <p:cNvSpPr txBox="1"/>
+          <p:nvPr/>
+        </p:nvSpPr>
+        <p:spPr>
+          <a:xfrm>
+            <a:off x="548640" y="201168"/>
+            <a:ext cx="11094415" cy="731520"/>
+          </a:xfrm>
+          <a:prstGeom prst="rect">
+            <a:avLst/>
+          </a:prstGeom>
+          <a:noFill/>
+        </p:spPr>
+        <p:txBody>
+          <a:bodyPr wrap="square">
+            <a:spAutoFit/>
+          </a:bodyPr>
+          <a:lstStyle/>
+          <a:p>
+            <a:pPr algn="l"/>
+            <a:r>
+              <a:rPr sz="3400" b="1">
+                <a:solidFill>
+                  <a:srgbClr val="FFFFFF"/>
+                </a:solidFill>
+                <a:latin typeface="Georgia"/>
+              </a:rPr>
+              <a:t>Privacy &amp; trust</a:t>
+            </a:r>
+          </a:p>
+        </p:txBody>
+      </p:sp>
+      <p:sp>
+        <p:nvSpPr>
+          <p:cNvPr id="4" name="TextBox 3"/>
+          <p:cNvSpPr txBox="1"/>
+          <p:nvPr/>
+        </p:nvSpPr>
+        <p:spPr>
+          <a:xfrm>
+            <a:off x="548640" y="1325880"/>
+            <a:ext cx="11094415" cy="5120640"/>
+          </a:xfrm>
+          <a:prstGeom prst="rect">
+            <a:avLst/>
+          </a:prstGeom>
+          <a:noFill/>
+        </p:spPr>
+        <p:txBody>
+          <a:bodyPr wrap="square" anchor="t">
+            <a:spAutoFit/>
+          </a:bodyPr>
+          <a:lstStyle/>
+          <a:p>
+            <a:pPr>
+              <a:lnSpc>
+                <a:spcPct val="120000"/>
+              </a:lnSpc>
+              <a:spcAft>
+                <a:spcPts val="1000"/>
+              </a:spcAft>
+              <a:defRPr sz="2200">
+                <a:solidFill>
+                  <a:srgbClr val="2D2A26"/>
+                </a:solidFill>
+                <a:latin typeface="Calibri"/>
+              </a:defRPr>
+            </a:pPr>
+            <a:r>
+              <a:t>• Your workspace is isolated from every other customer at the database level, not only by application code.</a:t>
+            </a:r>
+          </a:p>
+          <a:p>
+            <a:pPr>
+              <a:lnSpc>
+                <a:spcPct val="120000"/>
+              </a:lnSpc>
+              <a:spcAft>
+                <a:spcPts val="1000"/>
+              </a:spcAft>
+              <a:defRPr sz="2200">
+                <a:solidFill>
+                  <a:srgbClr val="2D2A26"/>
+                </a:solidFill>
+                <a:latin typeface="Calibri"/>
+              </a:defRPr>
+            </a:pPr>
+            <a:r>
+              <a:t>• Zero-data-retention hosting by default; your documents are not used to train anyone’s models.</a:t>
+            </a:r>
+          </a:p>
+          <a:p>
+            <a:pPr>
+              <a:lnSpc>
+                <a:spcPct val="120000"/>
+              </a:lnSpc>
+              <a:spcAft>
+                <a:spcPts val="1000"/>
+              </a:spcAft>
+              <a:defRPr sz="2200">
+                <a:solidFill>
+                  <a:srgbClr val="2D2A26"/>
+                </a:solidFill>
+                <a:latin typeface="Calibri"/>
+              </a:defRPr>
+            </a:pPr>
+            <a:r>
+              <a:t>• UK GDPR, with a Data Processing Agreement that names where your data is hosted, plus standard-format export and agreed return and deletion.</a:t>
+            </a:r>
+          </a:p>
+          <a:p>
+            <a:pPr>
+              <a:lnSpc>
+                <a:spcPct val="120000"/>
+              </a:lnSpc>
+              <a:spcAft>
+                <a:spcPts val="1000"/>
+              </a:spcAft>
+              <a:defRPr sz="2200">
+                <a:solidFill>
+                  <a:srgbClr val="2D2A26"/>
+                </a:solidFill>
+                <a:latin typeface="Calibri"/>
+              </a:defRPr>
+            </a:pPr>
+            <a:r>
+              <a:t>• Every AI call is recorded with usage and cost, and spending limits keep invoices predictable.</a:t>
+            </a:r>
+          </a:p>
+        </p:txBody>
+      </p:sp>
+      <p:sp>
+        <p:nvSpPr>
+          <p:cNvPr id="5" name="TextBox 4"/>
+          <p:cNvSpPr txBox="1"/>
+          <p:nvPr/>
+        </p:nvSpPr>
+        <p:spPr>
+          <a:xfrm>
+            <a:off x="548640" y="6537960"/>
+            <a:ext cx="11094415" cy="228600"/>
+          </a:xfrm>
+          <a:prstGeom prst="rect">
+            <a:avLst/>
+          </a:prstGeom>
+          <a:noFill/>
+        </p:spPr>
+        <p:txBody>
+          <a:bodyPr wrap="square">
+            <a:spAutoFit/>
+          </a:bodyPr>
+          <a:lstStyle/>
+          <a:p>
+            <a:pPr algn="r"/>
+            <a:r>
+              <a:rPr sz="1000" b="0">
+                <a:solidFill>
+                  <a:srgbClr val="5B5752"/>
+                </a:solidFill>
+                <a:latin typeface="Calibri"/>
+              </a:rPr>
+              <a:t>flowgridos.co.uk</a:t>
+            </a:r>
+          </a:p>
+        </p:txBody>
+      </p:sp>
+    </p:spTree>
+  </p:cSld>
+  <p:clrMapOvr>
+    <a:masterClrMapping/>
+  </p:clrMapOvr>
+</p:sld>
+</file>
+
+<file path=ppt/slides/slide7.xml><?xml version="1.0" encoding="utf-8"?>
 <p:sld xmlns:a="http://schemas.openxmlformats.org/drawingml/2006/main" xmlns:p="http://schemas.openxmlformats.org/presentationml/2006/main" xmlns:r="http://schemas.openxmlformats.org/officeDocument/2006/relationships">
   <p:cSld>
     <p:spTree>
